--- a/4 - Calibração/Aula 5.pptx
+++ b/4 - Calibração/Aula 5.pptx
@@ -26,6 +26,9 @@
     <p:sldId id="274" r:id="rId20"/>
     <p:sldId id="275" r:id="rId21"/>
     <p:sldId id="277" r:id="rId22"/>
+    <p:sldId id="278" r:id="rId23"/>
+    <p:sldId id="279" r:id="rId24"/>
+    <p:sldId id="280" r:id="rId25"/>
   </p:sldIdLst>
   <p:sldSz cx="12192000" cy="6858000"/>
   <p:notesSz cx="6858000" cy="9144000"/>
@@ -124,6 +127,11 @@
       </a:defRPr>
     </a:lvl9pPr>
   </p:defaultTextStyle>
+  <p:extLst>
+    <p:ext uri="{EFAFB233-063F-42B5-8137-9DF3F51BA10A}">
+      <p15:sldGuideLst xmlns:p15="http://schemas.microsoft.com/office/powerpoint/2012/main"/>
+    </p:ext>
+  </p:extLst>
 </p:presentation>
 </file>
 
@@ -10685,6 +10693,1031 @@
 </p:sld>
 </file>
 
+<file path=ppt/slides/slide22.xml><?xml version="1.0" encoding="utf-8"?>
+<p:sld xmlns:a="http://schemas.openxmlformats.org/drawingml/2006/main" xmlns:r="http://schemas.openxmlformats.org/officeDocument/2006/relationships" xmlns:p="http://schemas.openxmlformats.org/presentationml/2006/main">
+  <p:cSld>
+    <p:spTree>
+      <p:nvGrpSpPr>
+        <p:cNvPr id="1" name=""/>
+        <p:cNvGrpSpPr/>
+        <p:nvPr/>
+      </p:nvGrpSpPr>
+      <p:grpSpPr>
+        <a:xfrm>
+          <a:off x="0" y="0"/>
+          <a:ext cx="0" cy="0"/>
+          <a:chOff x="0" y="0"/>
+          <a:chExt cx="0" cy="0"/>
+        </a:xfrm>
+      </p:grpSpPr>
+      <p:pic>
+        <p:nvPicPr>
+          <p:cNvPr id="3" name="Imagem 2">
+            <a:extLst>
+              <a:ext uri="{FF2B5EF4-FFF2-40B4-BE49-F238E27FC236}">
+                <a16:creationId xmlns:a16="http://schemas.microsoft.com/office/drawing/2014/main" id="{74A38BE9-F853-C4BD-6F01-58D12F6A94A5}"/>
+              </a:ext>
+            </a:extLst>
+          </p:cNvPr>
+          <p:cNvPicPr>
+            <a:picLocks noChangeAspect="1"/>
+          </p:cNvPicPr>
+          <p:nvPr/>
+        </p:nvPicPr>
+        <p:blipFill>
+          <a:blip r:embed="rId2"/>
+          <a:stretch>
+            <a:fillRect/>
+          </a:stretch>
+        </p:blipFill>
+        <p:spPr>
+          <a:xfrm>
+            <a:off x="0" y="0"/>
+            <a:ext cx="7308825" cy="6858000"/>
+          </a:xfrm>
+          <a:prstGeom prst="rect">
+            <a:avLst/>
+          </a:prstGeom>
+        </p:spPr>
+      </p:pic>
+      <p:sp>
+        <p:nvSpPr>
+          <p:cNvPr id="5" name="CaixaDeTexto 4">
+            <a:extLst>
+              <a:ext uri="{FF2B5EF4-FFF2-40B4-BE49-F238E27FC236}">
+                <a16:creationId xmlns:a16="http://schemas.microsoft.com/office/drawing/2014/main" id="{8C2FBD09-C2B9-0A32-FD5B-B59510ADF45B}"/>
+              </a:ext>
+            </a:extLst>
+          </p:cNvPr>
+          <p:cNvSpPr txBox="1"/>
+          <p:nvPr/>
+        </p:nvSpPr>
+        <p:spPr>
+          <a:xfrm>
+            <a:off x="7559040" y="3266960"/>
+            <a:ext cx="4632960" cy="811761"/>
+          </a:xfrm>
+          <a:prstGeom prst="rect">
+            <a:avLst/>
+          </a:prstGeom>
+          <a:noFill/>
+        </p:spPr>
+        <p:txBody>
+          <a:bodyPr wrap="square">
+            <a:spAutoFit/>
+          </a:bodyPr>
+          <a:lstStyle/>
+          <a:p>
+            <a:pPr>
+              <a:lnSpc>
+                <a:spcPct val="113095"/>
+              </a:lnSpc>
+              <a:buNone/>
+            </a:pPr>
+            <a:r>
+              <a:rPr lang="pt-BR" sz="1050" b="0" dirty="0">
+                <a:solidFill>
+                  <a:srgbClr val="6A9955"/>
+                </a:solidFill>
+                <a:effectLst/>
+                <a:latin typeface="Consolas" panose="020B0609020204030204" pitchFamily="49" charset="0"/>
+              </a:rPr>
+              <a:t>//LOG</a:t>
+            </a:r>
+            <a:endParaRPr lang="pt-BR" sz="1050" b="0" dirty="0">
+              <a:solidFill>
+                <a:srgbClr val="CCCCCC"/>
+              </a:solidFill>
+              <a:effectLst/>
+              <a:latin typeface="Consolas" panose="020B0609020204030204" pitchFamily="49" charset="0"/>
+            </a:endParaRPr>
+          </a:p>
+          <a:p>
+            <a:pPr>
+              <a:lnSpc>
+                <a:spcPct val="113095"/>
+              </a:lnSpc>
+              <a:buNone/>
+            </a:pPr>
+            <a:r>
+              <a:rPr lang="pt-BR" sz="1050" b="0" dirty="0" err="1">
+                <a:solidFill>
+                  <a:srgbClr val="569CD6"/>
+                </a:solidFill>
+                <a:effectLst/>
+                <a:latin typeface="Consolas" panose="020B0609020204030204" pitchFamily="49" charset="0"/>
+              </a:rPr>
+              <a:t>import</a:t>
+            </a:r>
+            <a:r>
+              <a:rPr lang="pt-BR" sz="1050" b="0" dirty="0">
+                <a:solidFill>
+                  <a:srgbClr val="CCCCCC"/>
+                </a:solidFill>
+                <a:effectLst/>
+                <a:latin typeface="Consolas" panose="020B0609020204030204" pitchFamily="49" charset="0"/>
+              </a:rPr>
+              <a:t> </a:t>
+            </a:r>
+            <a:r>
+              <a:rPr lang="pt-BR" sz="1050" b="0" dirty="0">
+                <a:solidFill>
+                  <a:srgbClr val="4EC9B0"/>
+                </a:solidFill>
+                <a:effectLst/>
+                <a:latin typeface="Consolas" panose="020B0609020204030204" pitchFamily="49" charset="0"/>
+              </a:rPr>
+              <a:t>com</a:t>
+            </a:r>
+            <a:r>
+              <a:rPr lang="pt-BR" sz="1050" b="0" dirty="0">
+                <a:solidFill>
+                  <a:srgbClr val="D4D4D4"/>
+                </a:solidFill>
+                <a:effectLst/>
+                <a:latin typeface="Consolas" panose="020B0609020204030204" pitchFamily="49" charset="0"/>
+              </a:rPr>
+              <a:t>.</a:t>
+            </a:r>
+            <a:r>
+              <a:rPr lang="pt-BR" sz="1050" b="0" dirty="0">
+                <a:solidFill>
+                  <a:srgbClr val="4EC9B0"/>
+                </a:solidFill>
+                <a:effectLst/>
+                <a:latin typeface="Consolas" panose="020B0609020204030204" pitchFamily="49" charset="0"/>
+              </a:rPr>
+              <a:t>ctre</a:t>
+            </a:r>
+            <a:r>
+              <a:rPr lang="pt-BR" sz="1050" b="0" dirty="0">
+                <a:solidFill>
+                  <a:srgbClr val="D4D4D4"/>
+                </a:solidFill>
+                <a:effectLst/>
+                <a:latin typeface="Consolas" panose="020B0609020204030204" pitchFamily="49" charset="0"/>
+              </a:rPr>
+              <a:t>.</a:t>
+            </a:r>
+            <a:r>
+              <a:rPr lang="pt-BR" sz="1050" b="0" dirty="0">
+                <a:solidFill>
+                  <a:srgbClr val="4EC9B0"/>
+                </a:solidFill>
+                <a:effectLst/>
+                <a:latin typeface="Consolas" panose="020B0609020204030204" pitchFamily="49" charset="0"/>
+              </a:rPr>
+              <a:t>phoenix6</a:t>
+            </a:r>
+            <a:r>
+              <a:rPr lang="pt-BR" sz="1050" b="0" dirty="0">
+                <a:solidFill>
+                  <a:srgbClr val="D4D4D4"/>
+                </a:solidFill>
+                <a:effectLst/>
+                <a:latin typeface="Consolas" panose="020B0609020204030204" pitchFamily="49" charset="0"/>
+              </a:rPr>
+              <a:t>.</a:t>
+            </a:r>
+            <a:r>
+              <a:rPr lang="pt-BR" sz="1050" b="0" dirty="0">
+                <a:solidFill>
+                  <a:srgbClr val="4EC9B0"/>
+                </a:solidFill>
+                <a:effectLst/>
+                <a:latin typeface="Consolas" panose="020B0609020204030204" pitchFamily="49" charset="0"/>
+              </a:rPr>
+              <a:t>SignalLogger</a:t>
+            </a:r>
+            <a:r>
+              <a:rPr lang="pt-BR" sz="1050" b="0" dirty="0">
+                <a:solidFill>
+                  <a:srgbClr val="CCCCCC"/>
+                </a:solidFill>
+                <a:effectLst/>
+                <a:latin typeface="Consolas" panose="020B0609020204030204" pitchFamily="49" charset="0"/>
+              </a:rPr>
+              <a:t>;</a:t>
+            </a:r>
+          </a:p>
+          <a:p>
+            <a:pPr>
+              <a:lnSpc>
+                <a:spcPct val="113095"/>
+              </a:lnSpc>
+              <a:buNone/>
+            </a:pPr>
+            <a:br>
+              <a:rPr lang="pt-BR" sz="1050" b="0" dirty="0">
+                <a:solidFill>
+                  <a:srgbClr val="CCCCCC"/>
+                </a:solidFill>
+                <a:effectLst/>
+                <a:latin typeface="Consolas" panose="020B0609020204030204" pitchFamily="49" charset="0"/>
+              </a:rPr>
+            </a:br>
+            <a:endParaRPr lang="pt-BR" sz="1050" b="0" dirty="0">
+              <a:solidFill>
+                <a:srgbClr val="CCCCCC"/>
+              </a:solidFill>
+              <a:effectLst/>
+              <a:latin typeface="Consolas" panose="020B0609020204030204" pitchFamily="49" charset="0"/>
+            </a:endParaRPr>
+          </a:p>
+        </p:txBody>
+      </p:sp>
+    </p:spTree>
+    <p:extLst>
+      <p:ext uri="{BB962C8B-B14F-4D97-AF65-F5344CB8AC3E}">
+        <p14:creationId xmlns:p14="http://schemas.microsoft.com/office/powerpoint/2010/main" val="1837928060"/>
+      </p:ext>
+    </p:extLst>
+  </p:cSld>
+  <p:clrMapOvr>
+    <a:masterClrMapping/>
+  </p:clrMapOvr>
+</p:sld>
+</file>
+
+<file path=ppt/slides/slide23.xml><?xml version="1.0" encoding="utf-8"?>
+<p:sld xmlns:a="http://schemas.openxmlformats.org/drawingml/2006/main" xmlns:r="http://schemas.openxmlformats.org/officeDocument/2006/relationships" xmlns:p="http://schemas.openxmlformats.org/presentationml/2006/main">
+  <p:cSld>
+    <p:spTree>
+      <p:nvGrpSpPr>
+        <p:cNvPr id="1" name=""/>
+        <p:cNvGrpSpPr/>
+        <p:nvPr/>
+      </p:nvGrpSpPr>
+      <p:grpSpPr>
+        <a:xfrm>
+          <a:off x="0" y="0"/>
+          <a:ext cx="0" cy="0"/>
+          <a:chOff x="0" y="0"/>
+          <a:chExt cx="0" cy="0"/>
+        </a:xfrm>
+      </p:grpSpPr>
+      <p:pic>
+        <p:nvPicPr>
+          <p:cNvPr id="3" name="Imagem 2">
+            <a:extLst>
+              <a:ext uri="{FF2B5EF4-FFF2-40B4-BE49-F238E27FC236}">
+                <a16:creationId xmlns:a16="http://schemas.microsoft.com/office/drawing/2014/main" id="{1D877E8B-A612-C3E7-0CC1-E84504A24C84}"/>
+              </a:ext>
+            </a:extLst>
+          </p:cNvPr>
+          <p:cNvPicPr>
+            <a:picLocks noChangeAspect="1"/>
+          </p:cNvPicPr>
+          <p:nvPr/>
+        </p:nvPicPr>
+        <p:blipFill>
+          <a:blip r:embed="rId2"/>
+          <a:stretch>
+            <a:fillRect/>
+          </a:stretch>
+        </p:blipFill>
+        <p:spPr>
+          <a:xfrm>
+            <a:off x="0" y="0"/>
+            <a:ext cx="12192000" cy="6857999"/>
+          </a:xfrm>
+          <a:prstGeom prst="rect">
+            <a:avLst/>
+          </a:prstGeom>
+        </p:spPr>
+      </p:pic>
+    </p:spTree>
+    <p:extLst>
+      <p:ext uri="{BB962C8B-B14F-4D97-AF65-F5344CB8AC3E}">
+        <p14:creationId xmlns:p14="http://schemas.microsoft.com/office/powerpoint/2010/main" val="21105382"/>
+      </p:ext>
+    </p:extLst>
+  </p:cSld>
+  <p:clrMapOvr>
+    <a:masterClrMapping/>
+  </p:clrMapOvr>
+</p:sld>
+</file>
+
+<file path=ppt/slides/slide24.xml><?xml version="1.0" encoding="utf-8"?>
+<p:sld xmlns:a="http://schemas.openxmlformats.org/drawingml/2006/main" xmlns:r="http://schemas.openxmlformats.org/officeDocument/2006/relationships" xmlns:p="http://schemas.openxmlformats.org/presentationml/2006/main">
+  <p:cSld>
+    <p:bg>
+      <p:bgPr>
+        <a:solidFill>
+          <a:schemeClr val="tx1">
+            <a:lumMod val="85000"/>
+            <a:lumOff val="15000"/>
+          </a:schemeClr>
+        </a:solidFill>
+        <a:effectLst/>
+      </p:bgPr>
+    </p:bg>
+    <p:spTree>
+      <p:nvGrpSpPr>
+        <p:cNvPr id="1" name=""/>
+        <p:cNvGrpSpPr/>
+        <p:nvPr/>
+      </p:nvGrpSpPr>
+      <p:grpSpPr>
+        <a:xfrm>
+          <a:off x="0" y="0"/>
+          <a:ext cx="0" cy="0"/>
+          <a:chOff x="0" y="0"/>
+          <a:chExt cx="0" cy="0"/>
+        </a:xfrm>
+      </p:grpSpPr>
+      <p:sp>
+        <p:nvSpPr>
+          <p:cNvPr id="3" name="CaixaDeTexto 2">
+            <a:extLst>
+              <a:ext uri="{FF2B5EF4-FFF2-40B4-BE49-F238E27FC236}">
+                <a16:creationId xmlns:a16="http://schemas.microsoft.com/office/drawing/2014/main" id="{E13D5AEE-90B5-930C-A1D4-6336ACCC639B}"/>
+              </a:ext>
+            </a:extLst>
+          </p:cNvPr>
+          <p:cNvSpPr txBox="1"/>
+          <p:nvPr/>
+        </p:nvSpPr>
+        <p:spPr>
+          <a:xfrm>
+            <a:off x="91440" y="1656274"/>
+            <a:ext cx="6096000" cy="3733586"/>
+          </a:xfrm>
+          <a:prstGeom prst="rect">
+            <a:avLst/>
+          </a:prstGeom>
+          <a:noFill/>
+        </p:spPr>
+        <p:txBody>
+          <a:bodyPr wrap="square">
+            <a:spAutoFit/>
+          </a:bodyPr>
+          <a:lstStyle/>
+          <a:p>
+            <a:pPr>
+              <a:lnSpc>
+                <a:spcPct val="113095"/>
+              </a:lnSpc>
+              <a:buNone/>
+            </a:pPr>
+            <a:r>
+              <a:rPr lang="pt-BR" sz="1050" b="0" dirty="0">
+                <a:solidFill>
+                  <a:srgbClr val="CCCCCC"/>
+                </a:solidFill>
+                <a:effectLst/>
+                <a:latin typeface="Consolas" panose="020B0609020204030204" pitchFamily="49" charset="0"/>
+              </a:rPr>
+              <a:t>             </a:t>
+            </a:r>
+            <a:r>
+              <a:rPr lang="pt-BR" sz="1050" b="0" dirty="0" err="1">
+                <a:solidFill>
+                  <a:srgbClr val="9CDCFE"/>
+                </a:solidFill>
+                <a:effectLst/>
+                <a:latin typeface="Consolas" panose="020B0609020204030204" pitchFamily="49" charset="0"/>
+              </a:rPr>
+              <a:t>state</a:t>
+            </a:r>
+            <a:r>
+              <a:rPr lang="pt-BR" sz="1050" b="0" dirty="0">
+                <a:solidFill>
+                  <a:srgbClr val="CCCCCC"/>
+                </a:solidFill>
+                <a:effectLst/>
+                <a:latin typeface="Consolas" panose="020B0609020204030204" pitchFamily="49" charset="0"/>
+              </a:rPr>
+              <a:t> </a:t>
+            </a:r>
+            <a:r>
+              <a:rPr lang="pt-BR" sz="1050" b="0" dirty="0">
+                <a:solidFill>
+                  <a:srgbClr val="569CD6"/>
+                </a:solidFill>
+                <a:effectLst/>
+                <a:latin typeface="Consolas" panose="020B0609020204030204" pitchFamily="49" charset="0"/>
+              </a:rPr>
+              <a:t>-&gt;</a:t>
+            </a:r>
+            <a:r>
+              <a:rPr lang="pt-BR" sz="1050" b="0" dirty="0">
+                <a:solidFill>
+                  <a:srgbClr val="CCCCCC"/>
+                </a:solidFill>
+                <a:effectLst/>
+                <a:latin typeface="Consolas" panose="020B0609020204030204" pitchFamily="49" charset="0"/>
+              </a:rPr>
+              <a:t> {</a:t>
+            </a:r>
+          </a:p>
+          <a:p>
+            <a:pPr>
+              <a:lnSpc>
+                <a:spcPct val="113095"/>
+              </a:lnSpc>
+              <a:buNone/>
+            </a:pPr>
+            <a:br>
+              <a:rPr lang="pt-BR" sz="1050" b="0" dirty="0">
+                <a:solidFill>
+                  <a:srgbClr val="CCCCCC"/>
+                </a:solidFill>
+                <a:effectLst/>
+                <a:latin typeface="Consolas" panose="020B0609020204030204" pitchFamily="49" charset="0"/>
+              </a:rPr>
+            </a:br>
+            <a:endParaRPr lang="pt-BR" sz="1050" b="0" dirty="0">
+              <a:solidFill>
+                <a:srgbClr val="CCCCCC"/>
+              </a:solidFill>
+              <a:effectLst/>
+              <a:latin typeface="Consolas" panose="020B0609020204030204" pitchFamily="49" charset="0"/>
+            </a:endParaRPr>
+          </a:p>
+          <a:p>
+            <a:pPr>
+              <a:lnSpc>
+                <a:spcPct val="113095"/>
+              </a:lnSpc>
+              <a:buNone/>
+            </a:pPr>
+            <a:r>
+              <a:rPr lang="pt-BR" sz="1050" b="0" dirty="0">
+                <a:solidFill>
+                  <a:srgbClr val="CCCCCC"/>
+                </a:solidFill>
+                <a:effectLst/>
+                <a:latin typeface="Consolas" panose="020B0609020204030204" pitchFamily="49" charset="0"/>
+              </a:rPr>
+              <a:t>                            </a:t>
+            </a:r>
+            <a:r>
+              <a:rPr lang="pt-BR" sz="1050" b="0" dirty="0">
+                <a:solidFill>
+                  <a:srgbClr val="6A9955"/>
+                </a:solidFill>
+                <a:effectLst/>
+                <a:latin typeface="Consolas" panose="020B0609020204030204" pitchFamily="49" charset="0"/>
+              </a:rPr>
+              <a:t>// </a:t>
+            </a:r>
+            <a:r>
+              <a:rPr lang="pt-BR" sz="1050" b="0" dirty="0" err="1">
+                <a:solidFill>
+                  <a:srgbClr val="6A9955"/>
+                </a:solidFill>
+                <a:effectLst/>
+                <a:latin typeface="Consolas" panose="020B0609020204030204" pitchFamily="49" charset="0"/>
+              </a:rPr>
+              <a:t>AdvantageKit</a:t>
+            </a:r>
+            <a:endParaRPr lang="pt-BR" sz="1050" b="0" dirty="0">
+              <a:solidFill>
+                <a:srgbClr val="CCCCCC"/>
+              </a:solidFill>
+              <a:effectLst/>
+              <a:latin typeface="Consolas" panose="020B0609020204030204" pitchFamily="49" charset="0"/>
+            </a:endParaRPr>
+          </a:p>
+          <a:p>
+            <a:pPr>
+              <a:lnSpc>
+                <a:spcPct val="113095"/>
+              </a:lnSpc>
+              <a:buNone/>
+            </a:pPr>
+            <a:r>
+              <a:rPr lang="pt-BR" sz="1050" b="0" dirty="0">
+                <a:solidFill>
+                  <a:srgbClr val="CCCCCC"/>
+                </a:solidFill>
+                <a:effectLst/>
+                <a:latin typeface="Consolas" panose="020B0609020204030204" pitchFamily="49" charset="0"/>
+              </a:rPr>
+              <a:t>                            </a:t>
+            </a:r>
+            <a:r>
+              <a:rPr lang="pt-BR" sz="1050" b="0" dirty="0" err="1">
+                <a:solidFill>
+                  <a:srgbClr val="4EC9B0"/>
+                </a:solidFill>
+                <a:effectLst/>
+                <a:latin typeface="Consolas" panose="020B0609020204030204" pitchFamily="49" charset="0"/>
+              </a:rPr>
+              <a:t>Logger</a:t>
+            </a:r>
+            <a:r>
+              <a:rPr lang="pt-BR" sz="1050" b="0" dirty="0" err="1">
+                <a:solidFill>
+                  <a:srgbClr val="CCCCCC"/>
+                </a:solidFill>
+                <a:effectLst/>
+                <a:latin typeface="Consolas" panose="020B0609020204030204" pitchFamily="49" charset="0"/>
+              </a:rPr>
+              <a:t>.</a:t>
+            </a:r>
+            <a:r>
+              <a:rPr lang="pt-BR" sz="1050" b="0" dirty="0" err="1">
+                <a:solidFill>
+                  <a:srgbClr val="DCDCAA"/>
+                </a:solidFill>
+                <a:effectLst/>
+                <a:latin typeface="Consolas" panose="020B0609020204030204" pitchFamily="49" charset="0"/>
+              </a:rPr>
+              <a:t>recordOutput</a:t>
+            </a:r>
+            <a:r>
+              <a:rPr lang="pt-BR" sz="1050" b="0" dirty="0">
+                <a:solidFill>
+                  <a:srgbClr val="CCCCCC"/>
+                </a:solidFill>
+                <a:effectLst/>
+                <a:latin typeface="Consolas" panose="020B0609020204030204" pitchFamily="49" charset="0"/>
+              </a:rPr>
+              <a:t>(</a:t>
+            </a:r>
+          </a:p>
+          <a:p>
+            <a:pPr>
+              <a:lnSpc>
+                <a:spcPct val="113095"/>
+              </a:lnSpc>
+              <a:buNone/>
+            </a:pPr>
+            <a:r>
+              <a:rPr lang="pt-BR" sz="1050" b="0" dirty="0">
+                <a:solidFill>
+                  <a:srgbClr val="CCCCCC"/>
+                </a:solidFill>
+                <a:effectLst/>
+                <a:latin typeface="Consolas" panose="020B0609020204030204" pitchFamily="49" charset="0"/>
+              </a:rPr>
+              <a:t>                                </a:t>
+            </a:r>
+            <a:r>
+              <a:rPr lang="pt-BR" sz="1050" b="0" dirty="0">
+                <a:solidFill>
+                  <a:srgbClr val="CE9178"/>
+                </a:solidFill>
+                <a:effectLst/>
+                <a:latin typeface="Consolas" panose="020B0609020204030204" pitchFamily="49" charset="0"/>
+              </a:rPr>
+              <a:t>"</a:t>
+            </a:r>
+            <a:r>
+              <a:rPr lang="pt-BR" sz="1050" b="0" dirty="0" err="1">
+                <a:solidFill>
+                  <a:srgbClr val="CE9178"/>
+                </a:solidFill>
+                <a:effectLst/>
+                <a:latin typeface="Consolas" panose="020B0609020204030204" pitchFamily="49" charset="0"/>
+              </a:rPr>
+              <a:t>SysIdTestState</a:t>
+            </a:r>
+            <a:r>
+              <a:rPr lang="pt-BR" sz="1050" b="0" dirty="0">
+                <a:solidFill>
+                  <a:srgbClr val="CE9178"/>
+                </a:solidFill>
+                <a:effectLst/>
+                <a:latin typeface="Consolas" panose="020B0609020204030204" pitchFamily="49" charset="0"/>
+              </a:rPr>
+              <a:t>"</a:t>
+            </a:r>
+            <a:r>
+              <a:rPr lang="pt-BR" sz="1050" b="0" dirty="0">
+                <a:solidFill>
+                  <a:srgbClr val="CCCCCC"/>
+                </a:solidFill>
+                <a:effectLst/>
+                <a:latin typeface="Consolas" panose="020B0609020204030204" pitchFamily="49" charset="0"/>
+              </a:rPr>
+              <a:t>,</a:t>
+            </a:r>
+          </a:p>
+          <a:p>
+            <a:pPr>
+              <a:lnSpc>
+                <a:spcPct val="113095"/>
+              </a:lnSpc>
+              <a:buNone/>
+            </a:pPr>
+            <a:r>
+              <a:rPr lang="pt-BR" sz="1050" b="0" dirty="0">
+                <a:solidFill>
+                  <a:srgbClr val="CCCCCC"/>
+                </a:solidFill>
+                <a:effectLst/>
+                <a:latin typeface="Consolas" panose="020B0609020204030204" pitchFamily="49" charset="0"/>
+              </a:rPr>
+              <a:t>                                </a:t>
+            </a:r>
+            <a:r>
+              <a:rPr lang="pt-BR" sz="1050" b="0" dirty="0" err="1">
+                <a:solidFill>
+                  <a:srgbClr val="9CDCFE"/>
+                </a:solidFill>
+                <a:effectLst/>
+                <a:latin typeface="Consolas" panose="020B0609020204030204" pitchFamily="49" charset="0"/>
+              </a:rPr>
+              <a:t>state</a:t>
+            </a:r>
+            <a:r>
+              <a:rPr lang="pt-BR" sz="1050" b="0" dirty="0" err="1">
+                <a:solidFill>
+                  <a:srgbClr val="CCCCCC"/>
+                </a:solidFill>
+                <a:effectLst/>
+                <a:latin typeface="Consolas" panose="020B0609020204030204" pitchFamily="49" charset="0"/>
+              </a:rPr>
+              <a:t>.</a:t>
+            </a:r>
+            <a:r>
+              <a:rPr lang="pt-BR" sz="1050" b="0" dirty="0" err="1">
+                <a:solidFill>
+                  <a:srgbClr val="DCDCAA"/>
+                </a:solidFill>
+                <a:effectLst/>
+                <a:latin typeface="Consolas" panose="020B0609020204030204" pitchFamily="49" charset="0"/>
+              </a:rPr>
+              <a:t>toString</a:t>
+            </a:r>
+            <a:r>
+              <a:rPr lang="pt-BR" sz="1050" b="0" dirty="0">
+                <a:solidFill>
+                  <a:srgbClr val="CCCCCC"/>
+                </a:solidFill>
+                <a:effectLst/>
+                <a:latin typeface="Consolas" panose="020B0609020204030204" pitchFamily="49" charset="0"/>
+              </a:rPr>
+              <a:t>()</a:t>
+            </a:r>
+          </a:p>
+          <a:p>
+            <a:pPr>
+              <a:lnSpc>
+                <a:spcPct val="113095"/>
+              </a:lnSpc>
+              <a:buNone/>
+            </a:pPr>
+            <a:r>
+              <a:rPr lang="pt-BR" sz="1050" b="0" dirty="0">
+                <a:solidFill>
+                  <a:srgbClr val="CCCCCC"/>
+                </a:solidFill>
+                <a:effectLst/>
+                <a:latin typeface="Consolas" panose="020B0609020204030204" pitchFamily="49" charset="0"/>
+              </a:rPr>
+              <a:t>                            );</a:t>
+            </a:r>
+          </a:p>
+          <a:p>
+            <a:pPr>
+              <a:lnSpc>
+                <a:spcPct val="113095"/>
+              </a:lnSpc>
+              <a:buNone/>
+            </a:pPr>
+            <a:br>
+              <a:rPr lang="pt-BR" sz="1050" b="0" dirty="0">
+                <a:solidFill>
+                  <a:srgbClr val="CCCCCC"/>
+                </a:solidFill>
+                <a:effectLst/>
+                <a:latin typeface="Consolas" panose="020B0609020204030204" pitchFamily="49" charset="0"/>
+              </a:rPr>
+            </a:br>
+            <a:br>
+              <a:rPr lang="pt-BR" sz="1050" b="0" dirty="0">
+                <a:solidFill>
+                  <a:srgbClr val="CCCCCC"/>
+                </a:solidFill>
+                <a:effectLst/>
+                <a:latin typeface="Consolas" panose="020B0609020204030204" pitchFamily="49" charset="0"/>
+              </a:rPr>
+            </a:br>
+            <a:endParaRPr lang="pt-BR" sz="1050" b="0" dirty="0">
+              <a:solidFill>
+                <a:srgbClr val="CCCCCC"/>
+              </a:solidFill>
+              <a:effectLst/>
+              <a:latin typeface="Consolas" panose="020B0609020204030204" pitchFamily="49" charset="0"/>
+            </a:endParaRPr>
+          </a:p>
+          <a:p>
+            <a:pPr>
+              <a:lnSpc>
+                <a:spcPct val="113095"/>
+              </a:lnSpc>
+              <a:buNone/>
+            </a:pPr>
+            <a:r>
+              <a:rPr lang="pt-BR" sz="1050" b="0" dirty="0">
+                <a:solidFill>
+                  <a:srgbClr val="CCCCCC"/>
+                </a:solidFill>
+                <a:effectLst/>
+                <a:latin typeface="Consolas" panose="020B0609020204030204" pitchFamily="49" charset="0"/>
+              </a:rPr>
+              <a:t>                            </a:t>
+            </a:r>
+            <a:r>
+              <a:rPr lang="pt-BR" sz="1050" b="0" dirty="0">
+                <a:solidFill>
+                  <a:srgbClr val="6A9955"/>
+                </a:solidFill>
+                <a:effectLst/>
+                <a:latin typeface="Consolas" panose="020B0609020204030204" pitchFamily="49" charset="0"/>
+              </a:rPr>
+              <a:t>// CTRE .</a:t>
+            </a:r>
+            <a:r>
+              <a:rPr lang="pt-BR" sz="1050" b="0" dirty="0" err="1">
+                <a:solidFill>
+                  <a:srgbClr val="6A9955"/>
+                </a:solidFill>
+                <a:effectLst/>
+                <a:latin typeface="Consolas" panose="020B0609020204030204" pitchFamily="49" charset="0"/>
+              </a:rPr>
+              <a:t>hoot</a:t>
+            </a:r>
+            <a:endParaRPr lang="pt-BR" sz="1050" b="0" dirty="0">
+              <a:solidFill>
+                <a:srgbClr val="CCCCCC"/>
+              </a:solidFill>
+              <a:effectLst/>
+              <a:latin typeface="Consolas" panose="020B0609020204030204" pitchFamily="49" charset="0"/>
+            </a:endParaRPr>
+          </a:p>
+          <a:p>
+            <a:pPr>
+              <a:lnSpc>
+                <a:spcPct val="113095"/>
+              </a:lnSpc>
+              <a:buNone/>
+            </a:pPr>
+            <a:r>
+              <a:rPr lang="pt-BR" sz="1050" b="0" dirty="0">
+                <a:solidFill>
+                  <a:srgbClr val="CCCCCC"/>
+                </a:solidFill>
+                <a:effectLst/>
+                <a:latin typeface="Consolas" panose="020B0609020204030204" pitchFamily="49" charset="0"/>
+              </a:rPr>
+              <a:t>                            </a:t>
+            </a:r>
+            <a:r>
+              <a:rPr lang="pt-BR" sz="1050" b="0" dirty="0" err="1">
+                <a:solidFill>
+                  <a:srgbClr val="4EC9B0"/>
+                </a:solidFill>
+                <a:effectLst/>
+                <a:latin typeface="Consolas" panose="020B0609020204030204" pitchFamily="49" charset="0"/>
+              </a:rPr>
+              <a:t>SignalLogger</a:t>
+            </a:r>
+            <a:r>
+              <a:rPr lang="pt-BR" sz="1050" b="0" dirty="0" err="1">
+                <a:solidFill>
+                  <a:srgbClr val="CCCCCC"/>
+                </a:solidFill>
+                <a:effectLst/>
+                <a:latin typeface="Consolas" panose="020B0609020204030204" pitchFamily="49" charset="0"/>
+              </a:rPr>
+              <a:t>.</a:t>
+            </a:r>
+            <a:r>
+              <a:rPr lang="pt-BR" sz="1050" b="0" dirty="0" err="1">
+                <a:solidFill>
+                  <a:srgbClr val="DCDCAA"/>
+                </a:solidFill>
+                <a:effectLst/>
+                <a:latin typeface="Consolas" panose="020B0609020204030204" pitchFamily="49" charset="0"/>
+              </a:rPr>
+              <a:t>writeString</a:t>
+            </a:r>
+            <a:r>
+              <a:rPr lang="pt-BR" sz="1050" b="0" dirty="0">
+                <a:solidFill>
+                  <a:srgbClr val="CCCCCC"/>
+                </a:solidFill>
+                <a:effectLst/>
+                <a:latin typeface="Consolas" panose="020B0609020204030204" pitchFamily="49" charset="0"/>
+              </a:rPr>
+              <a:t>(</a:t>
+            </a:r>
+          </a:p>
+          <a:p>
+            <a:pPr>
+              <a:lnSpc>
+                <a:spcPct val="113095"/>
+              </a:lnSpc>
+              <a:buNone/>
+            </a:pPr>
+            <a:r>
+              <a:rPr lang="pt-BR" sz="1050" b="0" dirty="0">
+                <a:solidFill>
+                  <a:srgbClr val="CCCCCC"/>
+                </a:solidFill>
+                <a:effectLst/>
+                <a:latin typeface="Consolas" panose="020B0609020204030204" pitchFamily="49" charset="0"/>
+              </a:rPr>
+              <a:t>                                </a:t>
+            </a:r>
+            <a:r>
+              <a:rPr lang="pt-BR" sz="1050" b="0" dirty="0">
+                <a:solidFill>
+                  <a:srgbClr val="CE9178"/>
+                </a:solidFill>
+                <a:effectLst/>
+                <a:latin typeface="Consolas" panose="020B0609020204030204" pitchFamily="49" charset="0"/>
+              </a:rPr>
+              <a:t>"</a:t>
+            </a:r>
+            <a:r>
+              <a:rPr lang="pt-BR" sz="1050" b="0" dirty="0" err="1">
+                <a:solidFill>
+                  <a:srgbClr val="CE9178"/>
+                </a:solidFill>
+                <a:effectLst/>
+                <a:latin typeface="Consolas" panose="020B0609020204030204" pitchFamily="49" charset="0"/>
+              </a:rPr>
+              <a:t>state</a:t>
+            </a:r>
+            <a:r>
+              <a:rPr lang="pt-BR" sz="1050" b="0" dirty="0">
+                <a:solidFill>
+                  <a:srgbClr val="CE9178"/>
+                </a:solidFill>
+                <a:effectLst/>
+                <a:latin typeface="Consolas" panose="020B0609020204030204" pitchFamily="49" charset="0"/>
+              </a:rPr>
+              <a:t>"</a:t>
+            </a:r>
+            <a:r>
+              <a:rPr lang="pt-BR" sz="1050" b="0" dirty="0">
+                <a:solidFill>
+                  <a:srgbClr val="CCCCCC"/>
+                </a:solidFill>
+                <a:effectLst/>
+                <a:latin typeface="Consolas" panose="020B0609020204030204" pitchFamily="49" charset="0"/>
+              </a:rPr>
+              <a:t>,</a:t>
+            </a:r>
+          </a:p>
+          <a:p>
+            <a:pPr>
+              <a:lnSpc>
+                <a:spcPct val="113095"/>
+              </a:lnSpc>
+              <a:buNone/>
+            </a:pPr>
+            <a:r>
+              <a:rPr lang="pt-BR" sz="1050" b="0" dirty="0">
+                <a:solidFill>
+                  <a:srgbClr val="CCCCCC"/>
+                </a:solidFill>
+                <a:effectLst/>
+                <a:latin typeface="Consolas" panose="020B0609020204030204" pitchFamily="49" charset="0"/>
+              </a:rPr>
+              <a:t>                                </a:t>
+            </a:r>
+            <a:r>
+              <a:rPr lang="pt-BR" sz="1050" b="0" dirty="0" err="1">
+                <a:solidFill>
+                  <a:srgbClr val="9CDCFE"/>
+                </a:solidFill>
+                <a:effectLst/>
+                <a:latin typeface="Consolas" panose="020B0609020204030204" pitchFamily="49" charset="0"/>
+              </a:rPr>
+              <a:t>state</a:t>
+            </a:r>
+            <a:r>
+              <a:rPr lang="pt-BR" sz="1050" b="0" dirty="0" err="1">
+                <a:solidFill>
+                  <a:srgbClr val="CCCCCC"/>
+                </a:solidFill>
+                <a:effectLst/>
+                <a:latin typeface="Consolas" panose="020B0609020204030204" pitchFamily="49" charset="0"/>
+              </a:rPr>
+              <a:t>.</a:t>
+            </a:r>
+            <a:r>
+              <a:rPr lang="pt-BR" sz="1050" b="0" dirty="0" err="1">
+                <a:solidFill>
+                  <a:srgbClr val="DCDCAA"/>
+                </a:solidFill>
+                <a:effectLst/>
+                <a:latin typeface="Consolas" panose="020B0609020204030204" pitchFamily="49" charset="0"/>
+              </a:rPr>
+              <a:t>toString</a:t>
+            </a:r>
+            <a:r>
+              <a:rPr lang="pt-BR" sz="1050" b="0" dirty="0">
+                <a:solidFill>
+                  <a:srgbClr val="CCCCCC"/>
+                </a:solidFill>
+                <a:effectLst/>
+                <a:latin typeface="Consolas" panose="020B0609020204030204" pitchFamily="49" charset="0"/>
+              </a:rPr>
+              <a:t>()</a:t>
+            </a:r>
+          </a:p>
+          <a:p>
+            <a:pPr>
+              <a:lnSpc>
+                <a:spcPct val="113095"/>
+              </a:lnSpc>
+              <a:buNone/>
+            </a:pPr>
+            <a:r>
+              <a:rPr lang="pt-BR" sz="1050" b="0" dirty="0">
+                <a:solidFill>
+                  <a:srgbClr val="CCCCCC"/>
+                </a:solidFill>
+                <a:effectLst/>
+                <a:latin typeface="Consolas" panose="020B0609020204030204" pitchFamily="49" charset="0"/>
+              </a:rPr>
+              <a:t>                            );</a:t>
+            </a:r>
+          </a:p>
+          <a:p>
+            <a:pPr>
+              <a:lnSpc>
+                <a:spcPct val="113095"/>
+              </a:lnSpc>
+              <a:buNone/>
+            </a:pPr>
+            <a:r>
+              <a:rPr lang="pt-BR" sz="1050" b="0" dirty="0">
+                <a:solidFill>
+                  <a:srgbClr val="CCCCCC"/>
+                </a:solidFill>
+                <a:effectLst/>
+                <a:latin typeface="Consolas" panose="020B0609020204030204" pitchFamily="49" charset="0"/>
+              </a:rPr>
+              <a:t>                        }</a:t>
+            </a:r>
+          </a:p>
+          <a:p>
+            <a:pPr>
+              <a:lnSpc>
+                <a:spcPct val="113095"/>
+              </a:lnSpc>
+              <a:buNone/>
+            </a:pPr>
+            <a:r>
+              <a:rPr lang="pt-BR" sz="1050" b="0" dirty="0">
+                <a:solidFill>
+                  <a:srgbClr val="CCCCCC"/>
+                </a:solidFill>
+                <a:effectLst/>
+                <a:latin typeface="Consolas" panose="020B0609020204030204" pitchFamily="49" charset="0"/>
+              </a:rPr>
+              <a:t>                    ),</a:t>
+            </a:r>
+          </a:p>
+          <a:p>
+            <a:pPr>
+              <a:lnSpc>
+                <a:spcPct val="113095"/>
+              </a:lnSpc>
+              <a:buNone/>
+            </a:pPr>
+            <a:br>
+              <a:rPr lang="pt-BR" sz="1050" b="0" dirty="0">
+                <a:solidFill>
+                  <a:srgbClr val="CCCCCC"/>
+                </a:solidFill>
+                <a:effectLst/>
+                <a:latin typeface="Consolas" panose="020B0609020204030204" pitchFamily="49" charset="0"/>
+              </a:rPr>
+            </a:br>
+            <a:endParaRPr lang="pt-BR" sz="1050" b="0" dirty="0">
+              <a:solidFill>
+                <a:srgbClr val="CCCCCC"/>
+              </a:solidFill>
+              <a:effectLst/>
+              <a:latin typeface="Consolas" panose="020B0609020204030204" pitchFamily="49" charset="0"/>
+            </a:endParaRPr>
+          </a:p>
+        </p:txBody>
+      </p:sp>
+    </p:spTree>
+    <p:extLst>
+      <p:ext uri="{BB962C8B-B14F-4D97-AF65-F5344CB8AC3E}">
+        <p14:creationId xmlns:p14="http://schemas.microsoft.com/office/powerpoint/2010/main" val="618041476"/>
+      </p:ext>
+    </p:extLst>
+  </p:cSld>
+  <p:clrMapOvr>
+    <a:masterClrMapping/>
+  </p:clrMapOvr>
+</p:sld>
+</file>
+
 <file path=ppt/slides/slide3.xml><?xml version="1.0" encoding="utf-8"?>
 <p:sld xmlns:a="http://schemas.openxmlformats.org/drawingml/2006/main" xmlns:r="http://schemas.openxmlformats.org/officeDocument/2006/relationships" xmlns:p="http://schemas.openxmlformats.org/presentationml/2006/main">
   <p:cSld>
